--- a/decks/geog-gis/geog-gis_ch5_world-maps.pptx
+++ b/decks/geog-gis/geog-gis_ch5_world-maps.pptx
@@ -126,30 +126,30 @@
   <p:extLst>
     <p:ext uri="{521415D9-36F7-43E2-AB2F-B90AF26B5E84}">
       <p14:sectionLst xmlns:p14="http://schemas.microsoft.com/office/powerpoint/2010/main">
-        <p14:section name="Opening" id="{bfefd2de-074a-91a2-e243-239b2c8ab8b2}">
+        <p14:section name="Opening" id="{e39864b3-4824-1944-3e5a-78b2c898e5ec}">
           <p14:sldIdLst>
             <p14:sldId id="256"/>
           </p14:sldIdLst>
         </p14:section>
-        <p14:section name="Gate" id="{2f5d3afc-b193-24f3-b443-67a8895137e0}">
+        <p14:section name="Gate" id="{ab583723-7467-c9d5-a8fa-b2380a2da364}">
           <p14:sldIdLst>
             <p14:sldId id="257"/>
             <p14:sldId id="258"/>
           </p14:sldIdLst>
         </p14:section>
-        <p14:section name="Pre-teach" id="{a7833eb7-94b9-3646-fdde-074cf64111b0}">
+        <p14:section name="Pre-teach" id="{48b054b8-fcf0-f4ee-36b5-30f7a2ed9cd5}">
           <p14:sldIdLst>
             <p14:sldId id="259"/>
             <p14:sldId id="260"/>
           </p14:sldIdLst>
         </p14:section>
-        <p14:section name="Read-along" id="{90b0c058-3d14-148d-d137-fb63f9a1ede5}">
+        <p14:section name="Read-along" id="{29a01f68-b669-49dd-2eca-f469fa9ea2fe}">
           <p14:sldIdLst>
             <p14:sldId id="261"/>
             <p14:sldId id="262"/>
           </p14:sldIdLst>
         </p14:section>
-        <p14:section name="Teach" id="{3aefa3a8-e409-3f16-5b18-e5f98edf6008}">
+        <p14:section name="Teach" id="{01817e04-b15e-acdb-6722-c65182b50a4a}">
           <p14:sldIdLst>
             <p14:sldId id="263"/>
             <p14:sldId id="264"/>
@@ -157,7 +157,7 @@
             <p14:sldId id="266"/>
           </p14:sldIdLst>
         </p14:section>
-        <p14:section name="Routes" id="{a4e69d8b-1c1a-dc43-bb36-808a34a1e0f6}">
+        <p14:section name="Routes" id="{e5d0d40b-9dae-3567-823e-a19d4282d6cc}">
           <p14:sldIdLst>
             <p14:sldId id="267"/>
             <p14:sldId id="268"/>
@@ -165,12 +165,12 @@
             <p14:sldId id="270"/>
           </p14:sldIdLst>
         </p14:section>
-        <p14:section name="Close" id="{6cd5eb6a-a32f-c8c7-7eb8-cba3f8e72af4}">
+        <p14:section name="Close" id="{c7f72d49-c9cb-48e8-499d-3e0290f63ff5}">
           <p14:sldIdLst>
             <p14:sldId id="271"/>
           </p14:sldIdLst>
         </p14:section>
-        <p14:section name="Answers" id="{68be1087-de8e-96f0-2662-00417ddb3b0b}">
+        <p14:section name="Answers" id="{c4b0608b-87d0-57f2-ae22-f25e4fe111a0}">
           <p14:sldIdLst>
             <p14:sldId id="272"/>
             <p14:sldId id="273"/>
@@ -767,7 +767,7 @@
             <a:r>
               <a:rPr lang="en-US" dirty="0"/>
               <a:t>Teach — The progress check: what it asks. Say it in your own words, then check understanding with a quick question: ask a pupil from the pre-teach group first, since they met these words and ideas before the lesson. Pupils try to recall before you re-explain.
-The half-term progress check on GIS is a short written test worth 10 marks. Your deck shows the six questions it asks, and every one of them is covered in this unit. It asks what a GIS is; how to use a GIS to display a map on a computer using the four components; how we make sure our location or data shows up in the right place; what the information or data in a GIS map is called; what a heat map is, with an example; and two uses of a GIS.
+The half-term progress check on GIS is a short written test worth 10 marks. Your deck shows the six questions it asks, and every one of them is covered in this unit. It asks what a GIS is; how the four components work together to put a map on a screen; how a GIS keeps each piece of data in its true place; what the information in a GIS map is called; what a heat map is, with an example; and two uses of a GIS.
 Prepare one clear answer for each. A GIS is a computer system that stores data about places and shows it on a map. The four components are hardware, software, data and people: a person opens the software on the computer and adds data, which the software draws. Data appears in the right place because its latitude and longitude are recorded. The data in a GIS map is held as layers. A heat map uses colour to show where there is more or less of something, such as crime. Two uses: the police mapping crime, and geographers mapping earthquakes.
 The pattern of marks helps you plan. The one-mark questions want a definition or a word. The two-mark questions want two points: a description plus an example, or two reasons, or two uses. Use the key words from the glossary, because they are what the marker is looking for.
 Tip: One mark, one point. Two marks, two points. Use the key words every time.</a:t>
@@ -1048,7 +1048,7 @@
               <a:rPr lang="en-US" dirty="0"/>
               <a:t>Task 2: The progress check, in writing. Same task, three ways in: one destination for everyone; only the scaffold changes. Pupils take the lane their do-now score pointed to (3/3 Stretch, 2/3 Core, 0–1 Support) and may move up at any time.
 Start the pre-teach group first: they know the words and the passage, so set them going on the task before you turn to the rest. Recall before help: every pupil tries from memory before opening a lane.
-The task: Describe how to use a GIS to display a map on a computer, using the four components of a GIS. Then explain how we make sure our data shows up in the right place on the map. (4 marks)
+The task: A visitor asks what has to happen before a map can appear on a screen. Describe the part each of the four components plays, then explain how a GIS makes sure every piece of data lands in the right place. (4 marks)
 Support — work through the steps with the group: (1) Sentences 1 and 2: walk through the four components in the order they are used. Person, computer, software, data. (2) Make sure all four words appear: hardware, software, data, people. (3) Sentence 3: say what we record with every piece of data when we collect it. (4) Sentence 4: say what the software does with those two numbers.
 Parallel worked example for Support (model it, do not give the task answer): Describe how to use a library to find a book, using its four parts: the building, the catalogue computer, the books and the librarian. Then explain how the library makes sure each book is on the right shelf. (4 marks) Walk through the four parts in order: you go into the building, use the catalogue, ask the librarian, find the book.; Name all four parts.; Say what the library records for each book: a shelf number.; Say how that number is used: the book is put on the shelf with that number.. Answer: You go into the library building and use the catalogue computer to search for the book, and the librarian helps you find it on the shelves. Each book has a shelf number recorded when it arrives, and the librarian puts it on the shelf with that number, so every book is in the right place..
 Core — reveal the hint only on request: First half: four components in the order they are used. Second half: latitude and longitude, recorded then read.
@@ -1142,7 +1142,7 @@
               <a:rPr lang="en-US" dirty="0"/>
               <a:t>Task 2: The progress check, in writing. Same task, three ways in: one destination for everyone; only the scaffold changes. Pupils take the lane their do-now score pointed to (3/3 Stretch, 2/3 Core, 0–1 Support) and may move up at any time.
 Start the pre-teach group first: they know the words and the passage, so set them going on the task before you turn to the rest. Recall before help: every pupil tries from memory before opening a lane.
-The task: Describe how to use a GIS to display a map on a computer, using the four components of a GIS. Then explain how we make sure our data shows up in the right place on the map. (4 marks)
+The task: A visitor asks what has to happen before a map can appear on a screen. Describe the part each of the four components plays, then explain how a GIS makes sure every piece of data lands in the right place. (4 marks)
 Support — work through the steps with the group: (1) Sentences 1 and 2: walk through the four components in the order they are used. Person, computer, software, data. (2) Make sure all four words appear: hardware, software, data, people. (3) Sentence 3: say what we record with every piece of data when we collect it. (4) Sentence 4: say what the software does with those two numbers.
 Parallel worked example for Support (model it, do not give the task answer): Describe how to use a library to find a book, using its four parts: the building, the catalogue computer, the books and the librarian. Then explain how the library makes sure each book is on the right shelf. (4 marks) Walk through the four parts in order: you go into the building, use the catalogue, ask the librarian, find the book.; Name all four parts.; Say what the library records for each book: a shelf number.; Say how that number is used: the book is put on the shelf with that number.. Answer: You go into the library building and use the catalogue computer to search for the book, and the librarian helps you find it on the shelves. Each book has a shelf number recorded when it arrives, and the librarian puts it on the shelf with that number, so every book is in the right place..
 Core — reveal the hint only on request: First half: four components in the order they are used. Second half: latitude and longitude, recorded then read.
@@ -7147,7 +7147,7 @@
                 <a:ea typeface="Calibri" pitchFamily="34" charset="-122"/>
                 <a:cs typeface="Calibri" pitchFamily="34" charset="-120"/>
               </a:rPr>
-              <a:t>Describe how to use a GIS to display a map on a computer, using the four components of a GIS. Then explain how we make sure our data shows up in the right place on the map. (4 marks)</a:t>
+              <a:t>A visitor asks what has to happen before a map can appear on a screen. Describe the part each of the four components plays, then explain how a GIS makes sure every piece of data lands in the right place. (4 marks)</a:t>
             </a:r>
             <a:endParaRPr lang="en-US" sz="2600" dirty="0"/>
           </a:p>
